--- a/dist/초3/수학/자연수계산/초3_수학_자연수계산_09_세자리수÷한자리수.pptx
+++ b/dist/초3/수학/자연수계산/초3_수학_자연수계산_09_세자리수÷한자리수.pptx
@@ -120,13 +120,13 @@
   <p:extLst>
     <p:ext uri="{521415D9-36F7-43E2-AB2F-B90AF26B5E84}">
       <p14:sectionLst xmlns:p14="http://schemas.microsoft.com/office/powerpoint/2010/main">
-        <p14:section name="도입" id="{edda9c97-a516-9436-60d6-c84639180e3e}">
+        <p14:section name="도입" id="{71f86f69-9d51-86b6-6f0b-854a260d7cd4}">
           <p14:sldIdLst>
             <p14:sldId id="256"/>
             <p14:sldId id="257"/>
           </p14:sldIdLst>
         </p14:section>
-        <p14:section name="개념" id="{4862fca9-f973-6149-c708-bd429f44de10}">
+        <p14:section name="개념" id="{bfd74579-03bb-05a6-5a78-85c361191f70}">
           <p14:sldIdLst>
             <p14:sldId id="258"/>
             <p14:sldId id="259"/>
@@ -134,32 +134,32 @@
             <p14:sldId id="262"/>
           </p14:sldIdLst>
         </p14:section>
-        <p14:section name="연습" id="{3ff39b80-2ec9-0b3f-9846-83382c22ba93}">
+        <p14:section name="연습" id="{a4fc2503-6f42-f769-1920-660734b1127f}">
           <p14:sldIdLst>
             <p14:sldId id="260"/>
             <p14:sldId id="263"/>
             <p14:sldId id="264"/>
           </p14:sldIdLst>
         </p14:section>
-        <p14:section name="개념" id="{d982bb63-c009-0d67-3407-730e4940bed6}">
+        <p14:section name="개념" id="{5ccc295a-99a0-2c1d-3d83-be868fb757c9}">
           <p14:sldIdLst/>
         </p14:section>
-        <p14:section name="연습" id="{4b32b43b-0e89-df8f-9d2a-be1bd888b83e}">
+        <p14:section name="연습" id="{59c47c56-2ac9-c89c-ec54-5be8b809a505}">
           <p14:sldIdLst/>
         </p14:section>
-        <p14:section name="확인" id="{33391bd8-8667-c600-1193-7ceb24e1ca9f}">
+        <p14:section name="확인" id="{d0f8d4dd-c749-7a45-99e2-675ed4e50be4}">
           <p14:sldIdLst>
             <p14:sldId id="265"/>
             <p14:sldId id="266"/>
             <p14:sldId id="267"/>
           </p14:sldIdLst>
         </p14:section>
-        <p14:section name="정리" id="{4bfa75b4-a396-5805-1675-b2beec7ef3e4}">
+        <p14:section name="정리" id="{21993ba0-bbd3-e6fe-3091-1119c65bbb4d}">
           <p14:sldIdLst>
             <p14:sldId id="268"/>
           </p14:sldIdLst>
         </p14:section>
-        <p14:section name="보충" id="{bb9ce095-ffe6-9ba4-337f-e47df5001263}">
+        <p14:section name="보충" id="{5c12d6e0-21df-50ee-960b-8e20abe896f0}">
           <p14:sldIdLst>
             <p14:sldId id="269"/>
           </p14:sldIdLst>
@@ -3040,7 +3040,7 @@
           </p:nvPr>
         </p:nvGraphicFramePr>
         <p:xfrm>
-          <a:off x="8001000" y="1188720"/>
+          <a:off x="8001000" y="1217295"/>
           <a:ext cx="3291840" cy="914400"/>
         </p:xfrm>
         <a:graphic>
@@ -3053,7 +3053,7 @@
                 <a:gridCol w="822960"/>
                 <a:gridCol w="822960"/>
               </a:tblGrid>
-              <a:tr h="609600">
+              <a:tr h="590550">
                 <a:tc>
                   <a:txBody>
                     <a:bodyPr/>
@@ -3316,7 +3316,7 @@
                   </a:tcPr>
                 </a:tc>
               </a:tr>
-              <a:tr h="609600">
+              <a:tr h="590550">
                 <a:tc>
                   <a:txBody>
                     <a:bodyPr/>
@@ -3579,7 +3579,7 @@
                   </a:tcPr>
                 </a:tc>
               </a:tr>
-              <a:tr h="609600">
+              <a:tr h="590550">
                 <a:tc>
                   <a:txBody>
                     <a:bodyPr/>
@@ -6417,7 +6417,7 @@
           </p:nvPr>
         </p:nvGraphicFramePr>
         <p:xfrm>
-          <a:off x="8155168" y="1516380"/>
+          <a:off x="8155168" y="1569720"/>
           <a:ext cx="3108960" cy="914400"/>
         </p:xfrm>
         <a:graphic>
@@ -6429,7 +6429,7 @@
                 <a:gridCol w="1036320"/>
                 <a:gridCol w="1036320"/>
               </a:tblGrid>
-              <a:tr h="487680">
+              <a:tr h="472440">
                 <a:tc>
                   <a:txBody>
                     <a:bodyPr/>
@@ -6624,7 +6624,7 @@
                   </a:tcPr>
                 </a:tc>
               </a:tr>
-              <a:tr h="487680">
+              <a:tr h="472440">
                 <a:tc>
                   <a:txBody>
                     <a:bodyPr/>
@@ -6819,7 +6819,7 @@
                   </a:tcPr>
                 </a:tc>
               </a:tr>
-              <a:tr h="487680">
+              <a:tr h="472440">
                 <a:tc>
                   <a:txBody>
                     <a:bodyPr/>
@@ -7025,7 +7025,7 @@
                   </a:tcPr>
                 </a:tc>
               </a:tr>
-              <a:tr h="487680">
+              <a:tr h="472440">
                 <a:tc>
                   <a:txBody>
                     <a:bodyPr/>
@@ -7209,7 +7209,7 @@
                   </a:tcPr>
                 </a:tc>
               </a:tr>
-              <a:tr h="487680">
+              <a:tr h="472440">
                 <a:tc>
                   <a:txBody>
                     <a:bodyPr/>
@@ -7404,7 +7404,7 @@
                   </a:tcPr>
                 </a:tc>
               </a:tr>
-              <a:tr h="487680">
+              <a:tr h="472440">
                 <a:tc>
                   <a:txBody>
                     <a:bodyPr/>
@@ -7599,7 +7599,7 @@
                   </a:tcPr>
                 </a:tc>
               </a:tr>
-              <a:tr h="487680">
+              <a:tr h="472440">
                 <a:tc>
                   <a:txBody>
                     <a:bodyPr/>
@@ -10435,7 +10435,7 @@
           </p:nvPr>
         </p:nvGraphicFramePr>
         <p:xfrm>
-          <a:off x="7574890" y="1394460"/>
+          <a:off x="7574890" y="1468755"/>
           <a:ext cx="3840480" cy="914400"/>
         </p:xfrm>
         <a:graphic>
@@ -10448,7 +10448,7 @@
                 <a:gridCol w="960120"/>
                 <a:gridCol w="960120"/>
               </a:tblGrid>
-              <a:tr h="528320">
+              <a:tr h="511810">
                 <a:tc>
                   <a:txBody>
                     <a:bodyPr/>
@@ -10711,7 +10711,7 @@
                   </a:tcPr>
                 </a:tc>
               </a:tr>
-              <a:tr h="528320">
+              <a:tr h="511810">
                 <a:tc>
                   <a:txBody>
                     <a:bodyPr/>
@@ -10974,7 +10974,7 @@
                   </a:tcPr>
                 </a:tc>
               </a:tr>
-              <a:tr h="528320">
+              <a:tr h="511810">
                 <a:tc>
                   <a:txBody>
                     <a:bodyPr/>
@@ -11248,7 +11248,7 @@
                   </a:tcPr>
                 </a:tc>
               </a:tr>
-              <a:tr h="528320">
+              <a:tr h="511810">
                 <a:tc>
                   <a:txBody>
                     <a:bodyPr/>
@@ -11489,7 +11489,7 @@
                   </a:tcPr>
                 </a:tc>
               </a:tr>
-              <a:tr h="528320">
+              <a:tr h="511810">
                 <a:tc>
                   <a:txBody>
                     <a:bodyPr/>
@@ -11741,7 +11741,7 @@
                   </a:tcPr>
                 </a:tc>
               </a:tr>
-              <a:tr h="528320">
+              <a:tr h="511810">
                 <a:tc>
                   <a:txBody>
                     <a:bodyPr/>
@@ -11993,7 +11993,7 @@
                   </a:tcPr>
                 </a:tc>
               </a:tr>
-              <a:tr h="528320">
+              <a:tr h="511810">
                 <a:tc>
                   <a:txBody>
                     <a:bodyPr/>
@@ -12245,7 +12245,7 @@
                   </a:tcPr>
                 </a:tc>
               </a:tr>
-              <a:tr h="528320">
+              <a:tr h="511810">
                 <a:tc>
                   <a:txBody>
                     <a:bodyPr/>
@@ -12497,7 +12497,7 @@
                   </a:tcPr>
                 </a:tc>
               </a:tr>
-              <a:tr h="528320">
+              <a:tr h="511810">
                 <a:tc>
                   <a:txBody>
                     <a:bodyPr/>
@@ -13874,7 +13874,7 @@
           </p:nvPr>
         </p:nvGraphicFramePr>
         <p:xfrm>
-          <a:off x="7574890" y="1516380"/>
+          <a:off x="7574890" y="1569720"/>
           <a:ext cx="3840480" cy="914400"/>
         </p:xfrm>
         <a:graphic>
@@ -13887,7 +13887,7 @@
                 <a:gridCol w="960120"/>
                 <a:gridCol w="960120"/>
               </a:tblGrid>
-              <a:tr h="487680">
+              <a:tr h="472440">
                 <a:tc>
                   <a:txBody>
                     <a:bodyPr/>
@@ -14150,7 +14150,7 @@
                   </a:tcPr>
                 </a:tc>
               </a:tr>
-              <a:tr h="487680">
+              <a:tr h="472440">
                 <a:tc>
                   <a:txBody>
                     <a:bodyPr/>
@@ -14402,7 +14402,7 @@
                   </a:tcPr>
                 </a:tc>
               </a:tr>
-              <a:tr h="487680">
+              <a:tr h="472440">
                 <a:tc>
                   <a:txBody>
                     <a:bodyPr/>
@@ -14676,7 +14676,7 @@
                   </a:tcPr>
                 </a:tc>
               </a:tr>
-              <a:tr h="487680">
+              <a:tr h="472440">
                 <a:tc>
                   <a:txBody>
                     <a:bodyPr/>
@@ -14928,7 +14928,7 @@
                   </a:tcPr>
                 </a:tc>
               </a:tr>
-              <a:tr h="487680">
+              <a:tr h="472440">
                 <a:tc>
                   <a:txBody>
                     <a:bodyPr/>
@@ -15180,7 +15180,7 @@
                   </a:tcPr>
                 </a:tc>
               </a:tr>
-              <a:tr h="487680">
+              <a:tr h="472440">
                 <a:tc>
                   <a:txBody>
                     <a:bodyPr/>
@@ -15432,7 +15432,7 @@
                   </a:tcPr>
                 </a:tc>
               </a:tr>
-              <a:tr h="487680">
+              <a:tr h="472440">
                 <a:tc>
                   <a:txBody>
                     <a:bodyPr/>
@@ -16284,7 +16284,7 @@
           </p:nvPr>
         </p:nvGraphicFramePr>
         <p:xfrm>
-          <a:off x="1293876" y="2509520"/>
+          <a:off x="1293876" y="2542540"/>
           <a:ext cx="9601200" cy="914400"/>
         </p:xfrm>
         <a:graphic>
@@ -16296,7 +16296,7 @@
                 <a:gridCol w="4128516"/>
                 <a:gridCol w="2880360"/>
               </a:tblGrid>
-              <a:tr h="528320">
+              <a:tr h="511810">
                 <a:tc>
                   <a:txBody>
                     <a:bodyPr/>
@@ -16502,7 +16502,7 @@
                   </a:tcPr>
                 </a:tc>
               </a:tr>
-              <a:tr h="528320">
+              <a:tr h="511810">
                 <a:tc>
                   <a:txBody>
                     <a:bodyPr/>
@@ -16708,7 +16708,7 @@
                   </a:tcPr>
                 </a:tc>
               </a:tr>
-              <a:tr h="528320">
+              <a:tr h="511810">
                 <a:tc>
                   <a:txBody>
                     <a:bodyPr/>
@@ -16914,7 +16914,7 @@
                   </a:tcPr>
                 </a:tc>
               </a:tr>
-              <a:tr h="528320">
+              <a:tr h="511810">
                 <a:tc>
                   <a:txBody>
                     <a:bodyPr/>

--- a/dist/초3/수학/자연수계산/초3_수학_자연수계산_09_세자리수÷한자리수.pptx
+++ b/dist/초3/수학/자연수계산/초3_수학_자연수계산_09_세자리수÷한자리수.pptx
@@ -120,13 +120,13 @@
   <p:extLst>
     <p:ext uri="{521415D9-36F7-43E2-AB2F-B90AF26B5E84}">
       <p14:sectionLst xmlns:p14="http://schemas.microsoft.com/office/powerpoint/2010/main">
-        <p14:section name="도입" id="{71f86f69-9d51-86b6-6f0b-854a260d7cd4}">
+        <p14:section name="도입" id="{138e64a5-9209-a4cd-0592-2b5683218618}">
           <p14:sldIdLst>
             <p14:sldId id="256"/>
             <p14:sldId id="257"/>
           </p14:sldIdLst>
         </p14:section>
-        <p14:section name="개념" id="{bfd74579-03bb-05a6-5a78-85c361191f70}">
+        <p14:section name="개념" id="{2530ead2-41a1-9a5d-4a47-bd433635e050}">
           <p14:sldIdLst>
             <p14:sldId id="258"/>
             <p14:sldId id="259"/>
@@ -134,32 +134,32 @@
             <p14:sldId id="262"/>
           </p14:sldIdLst>
         </p14:section>
-        <p14:section name="연습" id="{a4fc2503-6f42-f769-1920-660734b1127f}">
+        <p14:section name="연습" id="{23a89f33-4f4c-4c89-b5e0-78df6e684851}">
           <p14:sldIdLst>
             <p14:sldId id="260"/>
             <p14:sldId id="263"/>
             <p14:sldId id="264"/>
           </p14:sldIdLst>
         </p14:section>
-        <p14:section name="개념" id="{5ccc295a-99a0-2c1d-3d83-be868fb757c9}">
+        <p14:section name="개념" id="{ae11b8a7-0c4d-14a0-6140-948087a82406}">
           <p14:sldIdLst/>
         </p14:section>
-        <p14:section name="연습" id="{59c47c56-2ac9-c89c-ec54-5be8b809a505}">
+        <p14:section name="연습" id="{08a5725f-c8d2-7ec7-345d-8c92a39f75cf}">
           <p14:sldIdLst/>
         </p14:section>
-        <p14:section name="확인" id="{d0f8d4dd-c749-7a45-99e2-675ed4e50be4}">
+        <p14:section name="확인" id="{bf006d10-ebcc-f204-41e5-12c3c5003311}">
           <p14:sldIdLst>
             <p14:sldId id="265"/>
             <p14:sldId id="266"/>
             <p14:sldId id="267"/>
           </p14:sldIdLst>
         </p14:section>
-        <p14:section name="정리" id="{21993ba0-bbd3-e6fe-3091-1119c65bbb4d}">
+        <p14:section name="정리" id="{860a8dd8-f0e9-684f-353b-15b9d8af8836}">
           <p14:sldIdLst>
             <p14:sldId id="268"/>
           </p14:sldIdLst>
         </p14:section>
-        <p14:section name="보충" id="{5c12d6e0-21df-50ee-960b-8e20abe896f0}">
+        <p14:section name="보충" id="{485e4083-50a7-4c23-7c71-9901c4f5256b}">
           <p14:sldIdLst>
             <p14:sldId id="269"/>
           </p14:sldIdLst>
@@ -977,7 +977,7 @@
 막히면
 - S04와 S06을 나란히 보여 주며 몫이 시작하는 자리를 비교합니다.
 주의
-- 이것으로 자연수의 곱셈·나눗셈 차시가 끝나고, 다음 차시부터 분수를 배웁니다. 복습 세 문제는 활동지 마지막 쪽과 함께 풉니다.</a:t>
+- 다음 두 차시(0이 있는 수의 뺄셈, 몫에 0이 있는 나눗셈)로 자연수 계산을 마무리하고, 그다음부터 분수를 배웁니다. 복습 세 문제는 활동지 마지막 쪽과 함께 풉니다.</a:t>
             </a:r>
             <a:endParaRPr lang="en-US" dirty="0"/>
           </a:p>
@@ -6213,7 +6213,7 @@
                 <a:ea typeface="맑은 고딕" pitchFamily="34" charset="-122"/>
                 <a:cs typeface="맑은 고딕" pitchFamily="34" charset="-120"/>
               </a:rPr>
-              <a:t>다음 시간: 분수의 뜻</a:t>
+              <a:t>다음 시간: 0이 있는 수의 뺄셈</a:t>
             </a:r>
             <a:endParaRPr lang="ko-KR" sz="2400" dirty="0"/>
           </a:p>
